--- a/pptx/Lecture10.pptx
+++ b/pptx/Lecture10.pptx
@@ -6034,8 +6034,8 @@
           </a:prstGeom>
         </p:spPr>
       </p:pic>
-      <mc:AlternateContent xmlns:mc="http://schemas.openxmlformats.org/markup-compatibility/2006">
-        <mc:Choice xmlns:a14="http://schemas.microsoft.com/office/drawing/2010/main" Requires="a14">
+      <mc:AlternateContent xmlns:mc="http://schemas.openxmlformats.org/markup-compatibility/2006" xmlns:a14="http://schemas.microsoft.com/office/drawing/2010/main">
+        <mc:Choice Requires="a14">
           <p:sp>
             <p:nvSpPr>
               <p:cNvPr id="12" name="Content Placeholder 2">
@@ -6180,7 +6180,7 @@
             </p:txBody>
           </p:sp>
         </mc:Choice>
-        <mc:Fallback>
+        <mc:Fallback xmlns="">
           <p:sp>
             <p:nvSpPr>
               <p:cNvPr id="12" name="Content Placeholder 2">
@@ -6709,8 +6709,8 @@
           </a:p>
         </p:txBody>
       </p:sp>
-      <mc:AlternateContent xmlns:mc="http://schemas.openxmlformats.org/markup-compatibility/2006">
-        <mc:Choice xmlns:a14="http://schemas.microsoft.com/office/drawing/2010/main" Requires="a14">
+      <mc:AlternateContent xmlns:mc="http://schemas.openxmlformats.org/markup-compatibility/2006" xmlns:a14="http://schemas.microsoft.com/office/drawing/2010/main">
+        <mc:Choice Requires="a14">
           <p:sp>
             <p:nvSpPr>
               <p:cNvPr id="3" name="Content Placeholder 2">
@@ -6831,7 +6831,7 @@
             </p:txBody>
           </p:sp>
         </mc:Choice>
-        <mc:Fallback>
+        <mc:Fallback xmlns="">
           <p:sp>
             <p:nvSpPr>
               <p:cNvPr id="3" name="Content Placeholder 2">
@@ -6936,8 +6936,8 @@
           </a:p>
         </p:txBody>
       </p:sp>
-      <mc:AlternateContent xmlns:mc="http://schemas.openxmlformats.org/markup-compatibility/2006">
-        <mc:Choice xmlns:a14="http://schemas.microsoft.com/office/drawing/2010/main" Requires="a14">
+      <mc:AlternateContent xmlns:mc="http://schemas.openxmlformats.org/markup-compatibility/2006" xmlns:a14="http://schemas.microsoft.com/office/drawing/2010/main">
+        <mc:Choice Requires="a14">
           <p:sp>
             <p:nvSpPr>
               <p:cNvPr id="3" name="Content Placeholder 2">
@@ -7049,7 +7049,7 @@
             </p:txBody>
           </p:sp>
         </mc:Choice>
-        <mc:Fallback>
+        <mc:Fallback xmlns="">
           <p:sp>
             <p:nvSpPr>
               <p:cNvPr id="3" name="Content Placeholder 2">
@@ -7154,8 +7154,8 @@
           </a:p>
         </p:txBody>
       </p:sp>
-      <mc:AlternateContent xmlns:mc="http://schemas.openxmlformats.org/markup-compatibility/2006">
-        <mc:Choice xmlns:a14="http://schemas.microsoft.com/office/drawing/2010/main" Requires="a14">
+      <mc:AlternateContent xmlns:mc="http://schemas.openxmlformats.org/markup-compatibility/2006" xmlns:a14="http://schemas.microsoft.com/office/drawing/2010/main">
+        <mc:Choice Requires="a14">
           <p:sp>
             <p:nvSpPr>
               <p:cNvPr id="3" name="Content Placeholder 2">
@@ -7198,7 +7198,7 @@
                         <m:rPr>
                           <m:nor/>
                         </m:rPr>
-                        <a:rPr lang="en-US" dirty="0">
+                        <a:rPr lang="en-US" i="0" dirty="0">
                           <a:latin typeface="Cambria Math" panose="02040503050406030204" pitchFamily="18" charset="0"/>
                         </a:rPr>
                         <m:t>Predicted sprint time</m:t>
@@ -7218,7 +7218,7 @@
                       <m:d>
                         <m:dPr>
                           <m:ctrlPr>
-                            <a:rPr lang="en-US" dirty="0">
+                            <a:rPr lang="en-US" i="0" dirty="0">
                               <a:latin typeface="Cambria Math" panose="02040503050406030204" pitchFamily="18" charset="0"/>
                             </a:rPr>
                           </m:ctrlPr>
@@ -7228,7 +7228,7 @@
                             <m:rPr>
                               <m:nor/>
                             </m:rPr>
-                            <a:rPr lang="en-US" dirty="0">
+                            <a:rPr lang="en-US" i="0" dirty="0">
                               <a:latin typeface="Cambria Math" panose="02040503050406030204" pitchFamily="18" charset="0"/>
                             </a:rPr>
                             <m:t>jump height </m:t>
@@ -7255,7 +7255,7 @@
             </p:txBody>
           </p:sp>
         </mc:Choice>
-        <mc:Fallback>
+        <mc:Fallback xmlns="">
           <p:sp>
             <p:nvSpPr>
               <p:cNvPr id="3" name="Content Placeholder 2">
@@ -9747,12 +9747,8 @@
           <a:p>
             <a:pPr lvl="0"/>
             <a:r>
-              <a:rPr lang="en-GB" dirty="0"/>
-              <a:t>Identify </a:t>
-            </a:r>
-            <a:r>
-              <a:rPr lang="en-GB" dirty="0" err="1"/>
-              <a:t>directionc</a:t>
+              <a:rPr lang="en-GB"/>
+              <a:t>Identify direction</a:t>
             </a:r>
             <a:endParaRPr lang="en-GB" dirty="0"/>
           </a:p>
